--- a/널스탁_결제경로_파일.pptx
+++ b/널스탁_결제경로_파일.pptx
@@ -3828,7 +3828,7 @@
                 </a:solidFill>
                 <a:latin typeface="Apple SD Gothic Neo"/>
               </a:rPr>
-              <a:t>⑥ 카드 결제경로 캡처 (정기결제용 카드 등록창)</a:t>
+              <a:t>⑤ 상품 선택 / 구매과정 캡처 (주문 확인)</a:t>
             </a:r>
           </a:p>
         </p:txBody>
@@ -3867,14 +3867,14 @@
                 </a:solidFill>
                 <a:latin typeface="Apple SD Gothic Neo"/>
               </a:rPr>
-              <a:t>'결제하기' 클릭 시 토스페이먼츠 정기결제용 카드 입력창 — 카드번호 / 유효기간 / 생년월일(주민번호 앞자리) / 약관 동의</a:t>
+              <a:t>'구독 시작하기' 클릭 시 주문 확인 모달 — 상품명 / 결제 금액 / 결제 방식(자동결제·매월 갱신) / 환불 조건 고지 후 '결제하기'</a:t>
             </a:r>
           </a:p>
         </p:txBody>
       </p:sp>
       <p:pic>
         <p:nvPicPr>
-          <p:cNvPr id="4" name="Picture 3" descr="08_toss_card_window.png"/>
+          <p:cNvPr id="4" name="Picture 3" descr="07_checkout_modal.png"/>
           <p:cNvPicPr>
             <a:picLocks noChangeAspect="1"/>
           </p:cNvPicPr>
@@ -3935,7 +3935,7 @@
                 </a:solidFill>
                 <a:latin typeface="Apple SD Gothic Neo"/>
               </a:rPr>
-              <a:t>캡처 URL : https://www.nullstock.im/pricing (토스페이먼츠 카드 등록창 오버레이)</a:t>
+              <a:t>캡처 URL : https://www.nullstock.im/pricing</a:t>
             </a:r>
           </a:p>
         </p:txBody>
@@ -3960,14 +3960,66 @@
       <p:grpSpPr/>
       <p:sp>
         <p:nvSpPr>
-          <p:cNvPr id="2" name="TextBox 1"/>
+          <p:cNvPr id="2" name="Rectangle 1"/>
+          <p:cNvSpPr/>
+          <p:nvPr/>
+        </p:nvSpPr>
+        <p:spPr>
+          <a:xfrm>
+            <a:off x="3813048" y="164592"/>
+            <a:ext cx="4572000" cy="475488"/>
+          </a:xfrm>
+          <a:prstGeom prst="rect">
+            <a:avLst/>
+          </a:prstGeom>
+          <a:solidFill>
+            <a:srgbClr val="3182F6"/>
+          </a:solidFill>
+          <a:ln>
+            <a:noFill/>
+          </a:ln>
+        </p:spPr>
+        <p:style>
+          <a:lnRef idx="1">
+            <a:schemeClr val="accent1"/>
+          </a:lnRef>
+          <a:fillRef idx="3">
+            <a:schemeClr val="accent1"/>
+          </a:fillRef>
+          <a:effectRef idx="2">
+            <a:schemeClr val="accent1"/>
+          </a:effectRef>
+          <a:fontRef idx="minor">
+            <a:schemeClr val="lt1"/>
+          </a:fontRef>
+        </p:style>
+        <p:txBody>
+          <a:bodyPr rtlCol="0" anchor="ctr"/>
+          <a:lstStyle/>
+          <a:p>
+            <a:pPr algn="ctr"/>
+            <a:r>
+              <a:rPr sz="1800" b="1">
+                <a:solidFill>
+                  <a:srgbClr val="FFFFFF"/>
+                </a:solidFill>
+                <a:latin typeface="Apple SD Gothic Neo"/>
+              </a:rPr>
+              <a:t>⑥ 카드 결제경로 캡처 (정기결제용 카드 등록창)</a:t>
+            </a:r>
+          </a:p>
+        </p:txBody>
+      </p:sp>
+      <p:sp>
+        <p:nvSpPr>
+          <p:cNvPr id="3" name="TextBox 2"/>
           <p:cNvSpPr txBox="1"/>
           <p:nvPr/>
         </p:nvSpPr>
         <p:spPr>
           <a:xfrm>
-            <a:off x="822960" y="457200"/>
-            <a:ext cx="10515600" cy="548640"/>
+            <a:off x="548640" y="694944"/>
+            <a:ext cx="11091672" cy="365760"/>
           </a:xfrm>
           <a:prstGeom prst="rect">
             <a:avLst/>
@@ -3980,33 +4032,62 @@
           </a:bodyPr>
           <a:lstStyle/>
           <a:p>
-            <a:pPr algn="l">
+            <a:pPr algn="ctr">
               <a:lnSpc>
                 <a:spcPct val="115000"/>
               </a:lnSpc>
             </a:pPr>
             <a:r>
-              <a:rPr sz="2600" b="1">
-                <a:solidFill>
-                  <a:srgbClr val="1B2A4A"/>
-                </a:solidFill>
-                <a:latin typeface="Apple SD Gothic Neo"/>
-              </a:rPr>
-              <a:t>참고사항</a:t>
-            </a:r>
-          </a:p>
-        </p:txBody>
-      </p:sp>
-      <p:sp>
-        <p:nvSpPr>
-          <p:cNvPr id="3" name="TextBox 2"/>
+              <a:rPr sz="1300" b="0">
+                <a:solidFill>
+                  <a:srgbClr val="6B7280"/>
+                </a:solidFill>
+                <a:latin typeface="Apple SD Gothic Neo"/>
+              </a:rPr>
+              <a:t>'결제하기' 클릭 시 토스페이먼츠 정기결제용 카드 입력창 — 카드번호 / 유효기간 / 생년월일(주민번호 앞자리) / 약관 동의</a:t>
+            </a:r>
+          </a:p>
+        </p:txBody>
+      </p:sp>
+      <p:pic>
+        <p:nvPicPr>
+          <p:cNvPr id="4" name="Picture 3" descr="08_toss_card_window.png"/>
+          <p:cNvPicPr>
+            <a:picLocks noChangeAspect="1"/>
+          </p:cNvPicPr>
+          <p:nvPr/>
+        </p:nvPicPr>
+        <p:blipFill>
+          <a:blip r:embed="rId2"/>
+          <a:stretch>
+            <a:fillRect/>
+          </a:stretch>
+        </p:blipFill>
+        <p:spPr>
+          <a:xfrm>
+            <a:off x="1446631" y="1170432"/>
+            <a:ext cx="9298432" cy="5230368"/>
+          </a:xfrm>
+          <a:prstGeom prst="rect">
+            <a:avLst/>
+          </a:prstGeom>
+          <a:ln w="12700">
+            <a:solidFill>
+              <a:srgbClr val="D1D5DB"/>
+            </a:solidFill>
+          </a:ln>
+        </p:spPr>
+      </p:pic>
+      <p:sp>
+        <p:nvSpPr>
+          <p:cNvPr id="5" name="TextBox 4"/>
           <p:cNvSpPr txBox="1"/>
           <p:nvPr/>
         </p:nvSpPr>
         <p:spPr>
           <a:xfrm>
-            <a:off x="822960" y="1280160"/>
-            <a:ext cx="10607040" cy="4937760"/>
+            <a:off x="548640" y="6473952"/>
+            <a:ext cx="11091672" cy="292608"/>
           </a:xfrm>
           <a:prstGeom prst="rect">
             <a:avLst/>
@@ -4019,163 +4100,19 @@
           </a:bodyPr>
           <a:lstStyle/>
           <a:p>
-            <a:pPr algn="l">
-              <a:lnSpc>
-                <a:spcPct val="135000"/>
-              </a:lnSpc>
-            </a:pPr>
-            <a:r>
-              <a:rPr sz="1500" b="0">
-                <a:solidFill>
-                  <a:srgbClr val="20252B"/>
-                </a:solidFill>
-                <a:latin typeface="Apple SD Gothic Neo"/>
-              </a:rPr>
-              <a:t>1. 본 서비스는 투자 전략 연구·백테스트·시뮬레이션 플랫폼이며, 투자 자문·종목 추천·매수/매도 알림 등의</a:t>
-            </a:r>
-          </a:p>
-          <a:p>
-            <a:pPr algn="l">
-              <a:lnSpc>
-                <a:spcPct val="135000"/>
-              </a:lnSpc>
-            </a:pPr>
-            <a:r>
-              <a:rPr sz="1500" b="0">
-                <a:solidFill>
-                  <a:srgbClr val="20252B"/>
-                </a:solidFill>
-                <a:latin typeface="Apple SD Gothic Neo"/>
-              </a:rPr>
-              <a:t>    자문 서비스는 제공하지 않습니다.</a:t>
-            </a:r>
-          </a:p>
-          <a:p>
-            <a:pPr algn="l">
-              <a:lnSpc>
-                <a:spcPct val="135000"/>
-              </a:lnSpc>
-            </a:pPr>
-            <a:r>
-              <a:rPr sz="1500" b="0">
-                <a:solidFill>
-                  <a:srgbClr val="20252B"/>
-                </a:solidFill>
-                <a:latin typeface="Apple SD Gothic Neo"/>
-              </a:rPr>
-              <a:t>2. 판매 상품은 무형 상품(온라인 구독 서비스)으로, Pro(월 25,000원)·Premium(월 49,000원) 두 가지입니다.</a:t>
-            </a:r>
-          </a:p>
-          <a:p>
-            <a:pPr algn="l">
-              <a:lnSpc>
-                <a:spcPct val="135000"/>
-              </a:lnSpc>
-            </a:pPr>
-            <a:r>
-              <a:rPr sz="1500" b="0">
-                <a:solidFill>
-                  <a:srgbClr val="20252B"/>
-                </a:solidFill>
-                <a:latin typeface="Apple SD Gothic Neo"/>
-              </a:rPr>
-              <a:t>    단건 결제 기준 최고 금액은 49,000원(VAT 포함)입니다.</a:t>
-            </a:r>
-          </a:p>
-          <a:p>
-            <a:pPr algn="l">
-              <a:lnSpc>
-                <a:spcPct val="135000"/>
-              </a:lnSpc>
-            </a:pPr>
-            <a:r>
-              <a:rPr sz="1500" b="0">
-                <a:solidFill>
-                  <a:srgbClr val="20252B"/>
-                </a:solidFill>
-                <a:latin typeface="Apple SD Gothic Neo"/>
-              </a:rPr>
-              <a:t>3. 결제는 토스페이먼츠 자동결제(빌링)로 이루어지며, 최초 카드 등록 후 매월 자동 갱신됩니다.</a:t>
-            </a:r>
-          </a:p>
-          <a:p>
-            <a:pPr algn="l">
-              <a:lnSpc>
-                <a:spcPct val="135000"/>
-              </a:lnSpc>
-            </a:pPr>
-            <a:r>
-              <a:rPr sz="1500" b="0">
-                <a:solidFill>
-                  <a:srgbClr val="20252B"/>
-                </a:solidFill>
-                <a:latin typeface="Apple SD Gothic Neo"/>
-              </a:rPr>
-              <a:t>    해지는 서비스 내에서 언제든 가능하며, 해지 시 다음 결제일부터 청구되지 않습니다.</a:t>
-            </a:r>
-          </a:p>
-          <a:p>
-            <a:pPr algn="l">
-              <a:lnSpc>
-                <a:spcPct val="135000"/>
-              </a:lnSpc>
-            </a:pPr>
-            <a:r>
-              <a:rPr sz="1500" b="0">
-                <a:solidFill>
-                  <a:srgbClr val="20252B"/>
-                </a:solidFill>
-                <a:latin typeface="Apple SD Gothic Neo"/>
-              </a:rPr>
-              <a:t>4. 서비스 제공 기간은 결제일로부터 1개월이며, 자동 갱신 해지 전까지 매월 반복됩니다.</a:t>
-            </a:r>
-          </a:p>
-          <a:p>
-            <a:pPr algn="l">
-              <a:lnSpc>
-                <a:spcPct val="135000"/>
-              </a:lnSpc>
-            </a:pPr>
-            <a:r>
-              <a:rPr sz="1500" b="0">
-                <a:solidFill>
-                  <a:srgbClr val="20252B"/>
-                </a:solidFill>
-                <a:latin typeface="Apple SD Gothic Neo"/>
-              </a:rPr>
-              <a:t>5. 환불 정책은 이용약관 제12조에 따르며, 주문 확인 모달에서 결제 전에 고지됩니다.</a:t>
-            </a:r>
-          </a:p>
-          <a:p>
-            <a:pPr algn="l">
-              <a:lnSpc>
-                <a:spcPct val="135000"/>
-              </a:lnSpc>
-            </a:pPr>
-            <a:r>
-              <a:rPr sz="1500" b="0">
-                <a:solidFill>
-                  <a:srgbClr val="20252B"/>
-                </a:solidFill>
-                <a:latin typeface="Apple SD Gothic Neo"/>
-              </a:rPr>
-              <a:t>6. 본 문서의 캡처는 테스트용 결제창 연동 상태에서 제작되었습니다. (테스트 연동 심사 가능 — 가이드 6항)</a:t>
-            </a:r>
-          </a:p>
-          <a:p>
-            <a:pPr algn="l">
-              <a:lnSpc>
-                <a:spcPct val="135000"/>
-              </a:lnSpc>
-            </a:pPr>
-            <a:r>
-              <a:rPr sz="1500" b="0">
-                <a:solidFill>
-                  <a:srgbClr val="20252B"/>
-                </a:solidFill>
-                <a:latin typeface="Apple SD Gothic Neo"/>
-              </a:rPr>
-              <a:t>7. 회원 전용 서비스로 비회원 구매는 불가하며, 표지의 테스트 계정으로 전체 결제 경로 확인이 가능합니다.</a:t>
+            <a:pPr algn="ctr">
+              <a:lnSpc>
+                <a:spcPct val="115000"/>
+              </a:lnSpc>
+            </a:pPr>
+            <a:r>
+              <a:rPr sz="1100" b="0">
+                <a:solidFill>
+                  <a:srgbClr val="3182F6"/>
+                </a:solidFill>
+                <a:latin typeface="Apple SD Gothic Neo"/>
+              </a:rPr>
+              <a:t>캡처 URL : https://www.nullstock.im/pricing (토스페이먼츠 카드 등록창 오버레이)</a:t>
             </a:r>
           </a:p>
         </p:txBody>
@@ -4206,8 +4143,8 @@
         </p:nvSpPr>
         <p:spPr>
           <a:xfrm>
-            <a:off x="822960" y="320040"/>
-            <a:ext cx="10515600" cy="502920"/>
+            <a:off x="822960" y="457200"/>
+            <a:ext cx="10515600" cy="548640"/>
           </a:xfrm>
           <a:prstGeom prst="rect">
             <a:avLst/>
@@ -4220,9 +4157,9 @@
           </a:bodyPr>
           <a:lstStyle/>
           <a:p>
-            <a:pPr>
-              <a:lnSpc>
-                <a:spcPct val="125000"/>
+            <a:pPr algn="l">
+              <a:lnSpc>
+                <a:spcPct val="115000"/>
               </a:lnSpc>
             </a:pPr>
             <a:r>
@@ -4232,64 +4169,21 @@
                 </a:solidFill>
                 <a:latin typeface="Apple SD Gothic Neo"/>
               </a:rPr>
-              <a:t>계약심사 필수질문 답변</a:t>
-            </a:r>
-          </a:p>
-        </p:txBody>
-      </p:sp>
-      <p:sp>
-        <p:nvSpPr>
-          <p:cNvPr id="3" name="Rectangle 2"/>
-          <p:cNvSpPr/>
-          <p:nvPr/>
-        </p:nvSpPr>
-        <p:spPr>
-          <a:xfrm>
-            <a:off x="822960" y="868680"/>
-            <a:ext cx="10515600" cy="27432"/>
-          </a:xfrm>
-          <a:prstGeom prst="rect">
-            <a:avLst/>
-          </a:prstGeom>
-          <a:solidFill>
-            <a:srgbClr val="3182F6"/>
-          </a:solidFill>
-          <a:ln>
-            <a:noFill/>
-          </a:ln>
-        </p:spPr>
-        <p:style>
-          <a:lnRef idx="1">
-            <a:schemeClr val="accent1"/>
-          </a:lnRef>
-          <a:fillRef idx="3">
-            <a:schemeClr val="accent1"/>
-          </a:fillRef>
-          <a:effectRef idx="2">
-            <a:schemeClr val="accent1"/>
-          </a:effectRef>
-          <a:fontRef idx="minor">
-            <a:schemeClr val="lt1"/>
-          </a:fontRef>
-        </p:style>
-        <p:txBody>
-          <a:bodyPr rtlCol="0" anchor="ctr"/>
-          <a:lstStyle/>
-          <a:p>
-            <a:pPr algn="ctr"/>
-          </a:p>
-        </p:txBody>
-      </p:sp>
-      <p:sp>
-        <p:nvSpPr>
-          <p:cNvPr id="4" name="TextBox 3"/>
+              <a:t>참고사항</a:t>
+            </a:r>
+          </a:p>
+        </p:txBody>
+      </p:sp>
+      <p:sp>
+        <p:nvSpPr>
+          <p:cNvPr id="3" name="TextBox 2"/>
           <p:cNvSpPr txBox="1"/>
           <p:nvPr/>
         </p:nvSpPr>
         <p:spPr>
           <a:xfrm>
-            <a:off x="822960" y="1143000"/>
-            <a:ext cx="10607040" cy="5394960"/>
+            <a:off x="822960" y="1280160"/>
+            <a:ext cx="10607040" cy="4937760"/>
           </a:xfrm>
           <a:prstGeom prst="rect">
             <a:avLst/>
@@ -4302,237 +4196,163 @@
           </a:bodyPr>
           <a:lstStyle/>
           <a:p>
-            <a:pPr>
-              <a:lnSpc>
-                <a:spcPct val="125000"/>
-              </a:lnSpc>
-            </a:pPr>
-            <a:r>
-              <a:rPr sz="1400" b="0">
+            <a:pPr algn="l">
+              <a:lnSpc>
+                <a:spcPct val="135000"/>
+              </a:lnSpc>
+            </a:pPr>
+            <a:r>
+              <a:rPr sz="1500" b="0">
                 <a:solidFill>
                   <a:srgbClr val="20252B"/>
                 </a:solidFill>
                 <a:latin typeface="Apple SD Gothic Neo"/>
               </a:rPr>
-              <a:t>① 결제 상품/서비스 확인 가능한 URL : https://www.nullstock.im/pricing</a:t>
-            </a:r>
-          </a:p>
-          <a:p>
-            <a:pPr>
-              <a:lnSpc>
-                <a:spcPct val="125000"/>
-              </a:lnSpc>
-            </a:pPr>
-          </a:p>
-          <a:p>
-            <a:pPr>
-              <a:lnSpc>
-                <a:spcPct val="125000"/>
-              </a:lnSpc>
-            </a:pPr>
-            <a:r>
-              <a:rPr sz="1400" b="0">
+              <a:t>1. 본 서비스는 투자 전략 연구·백테스트·시뮬레이션 플랫폼이며, 투자 자문·종목 추천·매수/매도 알림 등의</a:t>
+            </a:r>
+          </a:p>
+          <a:p>
+            <a:pPr algn="l">
+              <a:lnSpc>
+                <a:spcPct val="135000"/>
+              </a:lnSpc>
+            </a:pPr>
+            <a:r>
+              <a:rPr sz="1500" b="0">
                 <a:solidFill>
                   <a:srgbClr val="20252B"/>
                 </a:solidFill>
                 <a:latin typeface="Apple SD Gothic Neo"/>
               </a:rPr>
-              <a:t>② 환불 정책 확인 가능한 URL : https://www.nullstock.im/?legal=terms (이용약관 제12조 환불 정책)</a:t>
-            </a:r>
-          </a:p>
-          <a:p>
-            <a:pPr>
-              <a:lnSpc>
-                <a:spcPct val="125000"/>
-              </a:lnSpc>
-            </a:pPr>
-          </a:p>
-          <a:p>
-            <a:pPr>
-              <a:lnSpc>
-                <a:spcPct val="125000"/>
-              </a:lnSpc>
-            </a:pPr>
-            <a:r>
-              <a:rPr sz="1400" b="0">
+              <a:t>    자문 서비스는 제공하지 않습니다.</a:t>
+            </a:r>
+          </a:p>
+          <a:p>
+            <a:pPr algn="l">
+              <a:lnSpc>
+                <a:spcPct val="135000"/>
+              </a:lnSpc>
+            </a:pPr>
+            <a:r>
+              <a:rPr sz="1500" b="0">
                 <a:solidFill>
                   <a:srgbClr val="20252B"/>
                 </a:solidFill>
                 <a:latin typeface="Apple SD Gothic Neo"/>
               </a:rPr>
-              <a:t>③ 결제 상품/서비스 상세 내용 : 주식 투자 전략 연구·백테스트·시뮬레이션 플랫폼 '널스탁'의 유료 구독 서비스</a:t>
-            </a:r>
-          </a:p>
-          <a:p>
-            <a:pPr>
-              <a:lnSpc>
-                <a:spcPct val="125000"/>
-              </a:lnSpc>
-            </a:pPr>
-            <a:r>
-              <a:rPr sz="1400" b="0">
+              <a:t>2. 판매 상품은 무형 상품(온라인 구독 서비스)으로, Pro(월 25,000원)·Premium(월 49,000원) 두 가지입니다.</a:t>
+            </a:r>
+          </a:p>
+          <a:p>
+            <a:pPr algn="l">
+              <a:lnSpc>
+                <a:spcPct val="135000"/>
+              </a:lnSpc>
+            </a:pPr>
+            <a:r>
+              <a:rPr sz="1500" b="0">
                 <a:solidFill>
                   <a:srgbClr val="20252B"/>
                 </a:solidFill>
                 <a:latin typeface="Apple SD Gothic Neo"/>
               </a:rPr>
-              <a:t>    (무형 상품)입니다. 이용자가 직접 만든 투자 전략을 과거 데이터로 백테스트·시뮬레이션하는 연구 도구를 제공하며,</a:t>
-            </a:r>
-          </a:p>
-          <a:p>
-            <a:pPr>
-              <a:lnSpc>
-                <a:spcPct val="125000"/>
-              </a:lnSpc>
-            </a:pPr>
-            <a:r>
-              <a:rPr sz="1400" b="0">
+              <a:t>    단건 결제 기준 최고 금액은 49,000원(VAT 포함)입니다.</a:t>
+            </a:r>
+          </a:p>
+          <a:p>
+            <a:pPr algn="l">
+              <a:lnSpc>
+                <a:spcPct val="135000"/>
+              </a:lnSpc>
+            </a:pPr>
+            <a:r>
+              <a:rPr sz="1500" b="0">
                 <a:solidFill>
                   <a:srgbClr val="20252B"/>
                 </a:solidFill>
                 <a:latin typeface="Apple SD Gothic Neo"/>
               </a:rPr>
-              <a:t>    유료 플랜은 Pro(월 25,000원) · Premium(월 49,000원, VAT 포함) 2종입니다.</a:t>
-            </a:r>
-          </a:p>
-          <a:p>
-            <a:pPr>
-              <a:lnSpc>
-                <a:spcPct val="125000"/>
-              </a:lnSpc>
-            </a:pPr>
-            <a:r>
-              <a:rPr sz="1400" b="0">
+              <a:t>3. 결제는 토스페이먼츠 자동결제(빌링)로 이루어지며, 최초 카드 등록 후 매월 자동 갱신됩니다.</a:t>
+            </a:r>
+          </a:p>
+          <a:p>
+            <a:pPr algn="l">
+              <a:lnSpc>
+                <a:spcPct val="135000"/>
+              </a:lnSpc>
+            </a:pPr>
+            <a:r>
+              <a:rPr sz="1500" b="0">
                 <a:solidFill>
                   <a:srgbClr val="20252B"/>
                 </a:solidFill>
                 <a:latin typeface="Apple SD Gothic Neo"/>
               </a:rPr>
-              <a:t>    결제는 토스페이먼츠 자동결제(빌링)로 매월 갱신됩니다.</a:t>
-            </a:r>
-          </a:p>
-          <a:p>
-            <a:pPr>
-              <a:lnSpc>
-                <a:spcPct val="125000"/>
-              </a:lnSpc>
-            </a:pPr>
-          </a:p>
-          <a:p>
-            <a:pPr>
-              <a:lnSpc>
-                <a:spcPct val="125000"/>
-              </a:lnSpc>
-            </a:pPr>
-            <a:r>
-              <a:rPr sz="1400" b="0">
+              <a:t>    해지는 서비스 내에서 언제든 가능하며, 해지 시 다음 결제일부터 청구되지 않습니다.</a:t>
+            </a:r>
+          </a:p>
+          <a:p>
+            <a:pPr algn="l">
+              <a:lnSpc>
+                <a:spcPct val="135000"/>
+              </a:lnSpc>
+            </a:pPr>
+            <a:r>
+              <a:rPr sz="1500" b="0">
                 <a:solidFill>
                   <a:srgbClr val="20252B"/>
                 </a:solidFill>
                 <a:latin typeface="Apple SD Gothic Neo"/>
               </a:rPr>
-              <a:t>④ 단건 결제 기준 상품 금액 최고가 : 49,000원 (VAT 포함)</a:t>
-            </a:r>
-          </a:p>
-          <a:p>
-            <a:pPr>
-              <a:lnSpc>
-                <a:spcPct val="125000"/>
-              </a:lnSpc>
-            </a:pPr>
-          </a:p>
-          <a:p>
-            <a:pPr>
-              <a:lnSpc>
-                <a:spcPct val="125000"/>
-              </a:lnSpc>
-            </a:pPr>
-            <a:r>
-              <a:rPr sz="1400" b="0">
+              <a:t>4. 서비스 제공 기간은 결제일로부터 1개월이며, 자동 갱신 해지 전까지 매월 반복됩니다.</a:t>
+            </a:r>
+          </a:p>
+          <a:p>
+            <a:pPr algn="l">
+              <a:lnSpc>
+                <a:spcPct val="135000"/>
+              </a:lnSpc>
+            </a:pPr>
+            <a:r>
+              <a:rPr sz="1500" b="0">
                 <a:solidFill>
                   <a:srgbClr val="20252B"/>
                 </a:solidFill>
                 <a:latin typeface="Apple SD Gothic Neo"/>
               </a:rPr>
-              <a:t>+ 테스트계정 (비회원 구매 불가) : ID toss_tester@toss.com / PW tosspw2017</a:t>
-            </a:r>
-          </a:p>
-          <a:p>
-            <a:pPr>
-              <a:lnSpc>
-                <a:spcPct val="125000"/>
-              </a:lnSpc>
-            </a:pPr>
-            <a:r>
-              <a:rPr sz="1400" b="0">
+              <a:t>5. 환불 정책은 이용약관 제12조에 따르며, 주문 확인 모달에서 결제 전에 고지됩니다.</a:t>
+            </a:r>
+          </a:p>
+          <a:p>
+            <a:pPr algn="l">
+              <a:lnSpc>
+                <a:spcPct val="135000"/>
+              </a:lnSpc>
+            </a:pPr>
+            <a:r>
+              <a:rPr sz="1500" b="0">
                 <a:solidFill>
                   <a:srgbClr val="20252B"/>
                 </a:solidFill>
                 <a:latin typeface="Apple SD Gothic Neo"/>
               </a:rPr>
-              <a:t>    (이메일·비밀번호 로그인 — 소셜 로그인 아님)</a:t>
-            </a:r>
-          </a:p>
-          <a:p>
-            <a:pPr>
-              <a:lnSpc>
-                <a:spcPct val="125000"/>
-              </a:lnSpc>
-            </a:pPr>
-          </a:p>
-          <a:p>
-            <a:pPr>
-              <a:lnSpc>
-                <a:spcPct val="125000"/>
-              </a:lnSpc>
-            </a:pPr>
-            <a:r>
-              <a:rPr sz="1400" b="0">
+              <a:t>6. 본 문서의 캡처는 테스트용 결제창 연동 상태에서 제작되었습니다. (테스트 연동 심사 가능 — 가이드 6항)</a:t>
+            </a:r>
+          </a:p>
+          <a:p>
+            <a:pPr algn="l">
+              <a:lnSpc>
+                <a:spcPct val="135000"/>
+              </a:lnSpc>
+            </a:pPr>
+            <a:r>
+              <a:rPr sz="1500" b="0">
                 <a:solidFill>
                   <a:srgbClr val="20252B"/>
                 </a:solidFill>
                 <a:latin typeface="Apple SD Gothic Neo"/>
               </a:rPr>
-              <a:t>※ 매수·매도 알림, 종목 추천 등 자문 서비스는 일절 제공하지 않습니다.</a:t>
-            </a:r>
-          </a:p>
-          <a:p>
-            <a:pPr>
-              <a:lnSpc>
-                <a:spcPct val="125000"/>
-              </a:lnSpc>
-            </a:pPr>
-            <a:r>
-              <a:rPr sz="1400" b="0">
-                <a:solidFill>
-                  <a:srgbClr val="20252B"/>
-                </a:solidFill>
-                <a:latin typeface="Apple SD Gothic Neo"/>
-              </a:rPr>
-              <a:t>    본 서비스는 이용자가 직접 설계한 전략의 과거 데이터 시뮬레이션 결과만 표시합니다.</a:t>
-            </a:r>
-          </a:p>
-          <a:p>
-            <a:pPr>
-              <a:lnSpc>
-                <a:spcPct val="125000"/>
-              </a:lnSpc>
-            </a:pPr>
-          </a:p>
-          <a:p>
-            <a:pPr>
-              <a:lnSpc>
-                <a:spcPct val="125000"/>
-              </a:lnSpc>
-            </a:pPr>
-            <a:r>
-              <a:rPr sz="1400" b="0">
-                <a:solidFill>
-                  <a:srgbClr val="20252B"/>
-                </a:solidFill>
-                <a:latin typeface="Apple SD Gothic Neo"/>
-              </a:rPr>
-              <a:t>※ 최대 서비스제공기간 : 결제 1건 기준 1개월 (자동갱신 해지 시 다음 결제일부터 청구되지 않음)</a:t>
+              <a:t>7. 회원 전용 서비스로 비회원 구매는 불가하며, 표지의 테스트 계정으로 전체 결제 경로 확인이 가능합니다.</a:t>
             </a:r>
           </a:p>
         </p:txBody>
@@ -4557,14 +4377,53 @@
       <p:grpSpPr/>
       <p:sp>
         <p:nvSpPr>
-          <p:cNvPr id="2" name="Rectangle 1"/>
+          <p:cNvPr id="2" name="TextBox 1"/>
+          <p:cNvSpPr txBox="1"/>
+          <p:nvPr/>
+        </p:nvSpPr>
+        <p:spPr>
+          <a:xfrm>
+            <a:off x="822960" y="320040"/>
+            <a:ext cx="10515600" cy="502920"/>
+          </a:xfrm>
+          <a:prstGeom prst="rect">
+            <a:avLst/>
+          </a:prstGeom>
+          <a:noFill/>
+        </p:spPr>
+        <p:txBody>
+          <a:bodyPr wrap="square">
+            <a:spAutoFit/>
+          </a:bodyPr>
+          <a:lstStyle/>
+          <a:p>
+            <a:pPr>
+              <a:lnSpc>
+                <a:spcPct val="125000"/>
+              </a:lnSpc>
+            </a:pPr>
+            <a:r>
+              <a:rPr sz="2600" b="1">
+                <a:solidFill>
+                  <a:srgbClr val="1B2A4A"/>
+                </a:solidFill>
+                <a:latin typeface="Apple SD Gothic Neo"/>
+              </a:rPr>
+              <a:t>계약심사 필수질문 답변</a:t>
+            </a:r>
+          </a:p>
+        </p:txBody>
+      </p:sp>
+      <p:sp>
+        <p:nvSpPr>
+          <p:cNvPr id="3" name="Rectangle 2"/>
           <p:cNvSpPr/>
           <p:nvPr/>
         </p:nvSpPr>
         <p:spPr>
           <a:xfrm>
-            <a:off x="3813048" y="164592"/>
-            <a:ext cx="4572000" cy="475488"/>
+            <a:off x="822960" y="868680"/>
+            <a:ext cx="10515600" cy="27432"/>
           </a:xfrm>
           <a:prstGeom prst="rect">
             <a:avLst/>
@@ -4595,28 +4454,19 @@
           <a:lstStyle/>
           <a:p>
             <a:pPr algn="ctr"/>
-            <a:r>
-              <a:rPr sz="1800" b="1">
-                <a:solidFill>
-                  <a:srgbClr val="FFFFFF"/>
-                </a:solidFill>
-                <a:latin typeface="Apple SD Gothic Neo"/>
-              </a:rPr>
-              <a:t>가맹점 메인 화면</a:t>
-            </a:r>
-          </a:p>
-        </p:txBody>
-      </p:sp>
-      <p:sp>
-        <p:nvSpPr>
-          <p:cNvPr id="3" name="TextBox 2"/>
+          </a:p>
+        </p:txBody>
+      </p:sp>
+      <p:sp>
+        <p:nvSpPr>
+          <p:cNvPr id="4" name="TextBox 3"/>
           <p:cNvSpPr txBox="1"/>
           <p:nvPr/>
         </p:nvSpPr>
         <p:spPr>
           <a:xfrm>
-            <a:off x="548640" y="694944"/>
-            <a:ext cx="11091672" cy="365760"/>
+            <a:off x="822960" y="1143000"/>
+            <a:ext cx="10607040" cy="5394960"/>
           </a:xfrm>
           <a:prstGeom prst="rect">
             <a:avLst/>
@@ -4629,87 +4479,237 @@
           </a:bodyPr>
           <a:lstStyle/>
           <a:p>
-            <a:pPr algn="ctr">
-              <a:lnSpc>
-                <a:spcPct val="115000"/>
-              </a:lnSpc>
-            </a:pPr>
-            <a:r>
-              <a:rPr sz="1300" b="0">
-                <a:solidFill>
-                  <a:srgbClr val="6B7280"/>
-                </a:solidFill>
-                <a:latin typeface="Apple SD Gothic Neo"/>
-              </a:rPr>
-              <a:t>널스탁 메인 화면 — 투자 전략 연구·시뮬레이션 플랫폼</a:t>
-            </a:r>
-          </a:p>
-        </p:txBody>
-      </p:sp>
-      <p:pic>
-        <p:nvPicPr>
-          <p:cNvPr id="4" name="Picture 3" descr="01_main.png"/>
-          <p:cNvPicPr>
-            <a:picLocks noChangeAspect="1"/>
-          </p:cNvPicPr>
-          <p:nvPr/>
-        </p:nvPicPr>
-        <p:blipFill>
-          <a:blip r:embed="rId2"/>
-          <a:stretch>
-            <a:fillRect/>
-          </a:stretch>
-        </p:blipFill>
-        <p:spPr>
-          <a:xfrm>
-            <a:off x="1446631" y="1170432"/>
-            <a:ext cx="9298432" cy="5230368"/>
-          </a:xfrm>
-          <a:prstGeom prst="rect">
-            <a:avLst/>
-          </a:prstGeom>
-          <a:ln w="12700">
-            <a:solidFill>
-              <a:srgbClr val="D1D5DB"/>
-            </a:solidFill>
-          </a:ln>
-        </p:spPr>
-      </p:pic>
-      <p:sp>
-        <p:nvSpPr>
-          <p:cNvPr id="5" name="TextBox 4"/>
-          <p:cNvSpPr txBox="1"/>
-          <p:nvPr/>
-        </p:nvSpPr>
-        <p:spPr>
-          <a:xfrm>
-            <a:off x="548640" y="6473952"/>
-            <a:ext cx="11091672" cy="292608"/>
-          </a:xfrm>
-          <a:prstGeom prst="rect">
-            <a:avLst/>
-          </a:prstGeom>
-          <a:noFill/>
-        </p:spPr>
-        <p:txBody>
-          <a:bodyPr wrap="square">
-            <a:spAutoFit/>
-          </a:bodyPr>
-          <a:lstStyle/>
-          <a:p>
-            <a:pPr algn="ctr">
-              <a:lnSpc>
-                <a:spcPct val="115000"/>
-              </a:lnSpc>
-            </a:pPr>
-            <a:r>
-              <a:rPr sz="1100" b="0">
-                <a:solidFill>
-                  <a:srgbClr val="3182F6"/>
-                </a:solidFill>
-                <a:latin typeface="Apple SD Gothic Neo"/>
-              </a:rPr>
-              <a:t>캡처 URL : https://www.nullstock.im</a:t>
+            <a:pPr>
+              <a:lnSpc>
+                <a:spcPct val="125000"/>
+              </a:lnSpc>
+            </a:pPr>
+            <a:r>
+              <a:rPr sz="1400" b="0">
+                <a:solidFill>
+                  <a:srgbClr val="20252B"/>
+                </a:solidFill>
+                <a:latin typeface="Apple SD Gothic Neo"/>
+              </a:rPr>
+              <a:t>① 결제 상품/서비스 확인 가능한 URL : https://www.nullstock.im/pricing</a:t>
+            </a:r>
+          </a:p>
+          <a:p>
+            <a:pPr>
+              <a:lnSpc>
+                <a:spcPct val="125000"/>
+              </a:lnSpc>
+            </a:pPr>
+          </a:p>
+          <a:p>
+            <a:pPr>
+              <a:lnSpc>
+                <a:spcPct val="125000"/>
+              </a:lnSpc>
+            </a:pPr>
+            <a:r>
+              <a:rPr sz="1400" b="0">
+                <a:solidFill>
+                  <a:srgbClr val="20252B"/>
+                </a:solidFill>
+                <a:latin typeface="Apple SD Gothic Neo"/>
+              </a:rPr>
+              <a:t>② 환불 정책 확인 가능한 URL : https://www.nullstock.im/?legal=terms (이용약관 제12조 환불 정책)</a:t>
+            </a:r>
+          </a:p>
+          <a:p>
+            <a:pPr>
+              <a:lnSpc>
+                <a:spcPct val="125000"/>
+              </a:lnSpc>
+            </a:pPr>
+          </a:p>
+          <a:p>
+            <a:pPr>
+              <a:lnSpc>
+                <a:spcPct val="125000"/>
+              </a:lnSpc>
+            </a:pPr>
+            <a:r>
+              <a:rPr sz="1400" b="0">
+                <a:solidFill>
+                  <a:srgbClr val="20252B"/>
+                </a:solidFill>
+                <a:latin typeface="Apple SD Gothic Neo"/>
+              </a:rPr>
+              <a:t>③ 결제 상품/서비스 상세 내용 : 주식 투자 전략 연구·백테스트·시뮬레이션 플랫폼 '널스탁'의 유료 구독 서비스</a:t>
+            </a:r>
+          </a:p>
+          <a:p>
+            <a:pPr>
+              <a:lnSpc>
+                <a:spcPct val="125000"/>
+              </a:lnSpc>
+            </a:pPr>
+            <a:r>
+              <a:rPr sz="1400" b="0">
+                <a:solidFill>
+                  <a:srgbClr val="20252B"/>
+                </a:solidFill>
+                <a:latin typeface="Apple SD Gothic Neo"/>
+              </a:rPr>
+              <a:t>    (무형 상품)입니다. 이용자가 직접 만든 투자 전략을 과거 데이터로 백테스트·시뮬레이션하는 연구 도구를 제공하며,</a:t>
+            </a:r>
+          </a:p>
+          <a:p>
+            <a:pPr>
+              <a:lnSpc>
+                <a:spcPct val="125000"/>
+              </a:lnSpc>
+            </a:pPr>
+            <a:r>
+              <a:rPr sz="1400" b="0">
+                <a:solidFill>
+                  <a:srgbClr val="20252B"/>
+                </a:solidFill>
+                <a:latin typeface="Apple SD Gothic Neo"/>
+              </a:rPr>
+              <a:t>    유료 플랜은 Pro(월 25,000원) · Premium(월 49,000원, VAT 포함) 2종입니다.</a:t>
+            </a:r>
+          </a:p>
+          <a:p>
+            <a:pPr>
+              <a:lnSpc>
+                <a:spcPct val="125000"/>
+              </a:lnSpc>
+            </a:pPr>
+            <a:r>
+              <a:rPr sz="1400" b="0">
+                <a:solidFill>
+                  <a:srgbClr val="20252B"/>
+                </a:solidFill>
+                <a:latin typeface="Apple SD Gothic Neo"/>
+              </a:rPr>
+              <a:t>    결제는 토스페이먼츠 자동결제(빌링)로 매월 갱신됩니다.</a:t>
+            </a:r>
+          </a:p>
+          <a:p>
+            <a:pPr>
+              <a:lnSpc>
+                <a:spcPct val="125000"/>
+              </a:lnSpc>
+            </a:pPr>
+          </a:p>
+          <a:p>
+            <a:pPr>
+              <a:lnSpc>
+                <a:spcPct val="125000"/>
+              </a:lnSpc>
+            </a:pPr>
+            <a:r>
+              <a:rPr sz="1400" b="0">
+                <a:solidFill>
+                  <a:srgbClr val="20252B"/>
+                </a:solidFill>
+                <a:latin typeface="Apple SD Gothic Neo"/>
+              </a:rPr>
+              <a:t>④ 단건 결제 기준 상품 금액 최고가 : 49,000원 (VAT 포함)</a:t>
+            </a:r>
+          </a:p>
+          <a:p>
+            <a:pPr>
+              <a:lnSpc>
+                <a:spcPct val="125000"/>
+              </a:lnSpc>
+            </a:pPr>
+          </a:p>
+          <a:p>
+            <a:pPr>
+              <a:lnSpc>
+                <a:spcPct val="125000"/>
+              </a:lnSpc>
+            </a:pPr>
+            <a:r>
+              <a:rPr sz="1400" b="0">
+                <a:solidFill>
+                  <a:srgbClr val="20252B"/>
+                </a:solidFill>
+                <a:latin typeface="Apple SD Gothic Neo"/>
+              </a:rPr>
+              <a:t>+ 테스트계정 (비회원 구매 불가) : ID toss_tester@toss.com / PW tosspw2017</a:t>
+            </a:r>
+          </a:p>
+          <a:p>
+            <a:pPr>
+              <a:lnSpc>
+                <a:spcPct val="125000"/>
+              </a:lnSpc>
+            </a:pPr>
+            <a:r>
+              <a:rPr sz="1400" b="0">
+                <a:solidFill>
+                  <a:srgbClr val="20252B"/>
+                </a:solidFill>
+                <a:latin typeface="Apple SD Gothic Neo"/>
+              </a:rPr>
+              <a:t>    (이메일·비밀번호 로그인 — 소셜 로그인 아님)</a:t>
+            </a:r>
+          </a:p>
+          <a:p>
+            <a:pPr>
+              <a:lnSpc>
+                <a:spcPct val="125000"/>
+              </a:lnSpc>
+            </a:pPr>
+          </a:p>
+          <a:p>
+            <a:pPr>
+              <a:lnSpc>
+                <a:spcPct val="125000"/>
+              </a:lnSpc>
+            </a:pPr>
+            <a:r>
+              <a:rPr sz="1400" b="0">
+                <a:solidFill>
+                  <a:srgbClr val="20252B"/>
+                </a:solidFill>
+                <a:latin typeface="Apple SD Gothic Neo"/>
+              </a:rPr>
+              <a:t>※ 매수·매도 알림, 종목 추천 등 자문 서비스는 일절 제공하지 않습니다.</a:t>
+            </a:r>
+          </a:p>
+          <a:p>
+            <a:pPr>
+              <a:lnSpc>
+                <a:spcPct val="125000"/>
+              </a:lnSpc>
+            </a:pPr>
+            <a:r>
+              <a:rPr sz="1400" b="0">
+                <a:solidFill>
+                  <a:srgbClr val="20252B"/>
+                </a:solidFill>
+                <a:latin typeface="Apple SD Gothic Neo"/>
+              </a:rPr>
+              <a:t>    본 서비스는 이용자가 직접 설계한 전략의 과거 데이터 시뮬레이션 결과만 표시합니다.</a:t>
+            </a:r>
+          </a:p>
+          <a:p>
+            <a:pPr>
+              <a:lnSpc>
+                <a:spcPct val="125000"/>
+              </a:lnSpc>
+            </a:pPr>
+          </a:p>
+          <a:p>
+            <a:pPr>
+              <a:lnSpc>
+                <a:spcPct val="125000"/>
+              </a:lnSpc>
+            </a:pPr>
+            <a:r>
+              <a:rPr sz="1400" b="0">
+                <a:solidFill>
+                  <a:srgbClr val="20252B"/>
+                </a:solidFill>
+                <a:latin typeface="Apple SD Gothic Neo"/>
+              </a:rPr>
+              <a:t>※ 최대 서비스제공기간 : 결제 1건 기준 1개월 (자동갱신 해지 시 다음 결제일부터 청구되지 않음)</a:t>
             </a:r>
           </a:p>
         </p:txBody>
@@ -4779,7 +4779,7 @@
                 </a:solidFill>
                 <a:latin typeface="Apple SD Gothic Neo"/>
               </a:rPr>
-              <a:t>② 하단정보 캡처</a:t>
+              <a:t>가맹점 메인 화면</a:t>
             </a:r>
           </a:p>
         </p:txBody>
@@ -4818,14 +4818,14 @@
                 </a:solidFill>
                 <a:latin typeface="Apple SD Gothic Neo"/>
               </a:rPr>
-              <a:t>메인 화면 하단 사업자 정보 — 상호명 / 사업자등록번호 / 통신판매업신고번호 / 대표자명 / 사업장주소 / 이메일</a:t>
+              <a:t>널스탁 메인 화면 — 투자 전략 연구·시뮬레이션 플랫폼</a:t>
             </a:r>
           </a:p>
         </p:txBody>
       </p:sp>
       <p:pic>
         <p:nvPicPr>
-          <p:cNvPr id="4" name="Picture 3" descr="02_footer.png"/>
+          <p:cNvPr id="4" name="Picture 3" descr="01_main.png"/>
           <p:cNvPicPr>
             <a:picLocks noChangeAspect="1"/>
           </p:cNvPicPr>
@@ -4886,7 +4886,7 @@
                 </a:solidFill>
                 <a:latin typeface="Apple SD Gothic Neo"/>
               </a:rPr>
-              <a:t>캡처 URL : https://www.nullstock.im (메인 화면 최하단)</a:t>
+              <a:t>캡처 URL : https://www.nullstock.im</a:t>
             </a:r>
           </a:p>
         </p:txBody>
@@ -4956,7 +4956,7 @@
                 </a:solidFill>
                 <a:latin typeface="Apple SD Gothic Neo"/>
               </a:rPr>
-              <a:t>③ 환불규정 캡처 (1/2)</a:t>
+              <a:t>② 하단정보 캡처</a:t>
             </a:r>
           </a:p>
         </p:txBody>
@@ -4995,21 +4995,21 @@
                 </a:solidFill>
                 <a:latin typeface="Apple SD Gothic Neo"/>
               </a:rPr>
-              <a:t>이용약관 제12조(환불 정책) — 결제 전 고지·미사용 시 전액 환불·유료 기능 사용 후 환불 제한</a:t>
+              <a:t>메인 화면 하단 사업자 정보 — 상호명 / 사업자등록번호 / 통신판매업신고번호 / 대표자명 / 사업장주소 / 상점 전화번호 / 이메일</a:t>
             </a:r>
           </a:p>
         </p:txBody>
       </p:sp>
       <p:pic>
         <p:nvPicPr>
-          <p:cNvPr id="4" name="Picture 3" descr="03_refund.png"/>
+          <p:cNvPr id="6" name="Picture 5" descr="02_footer.png"/>
           <p:cNvPicPr>
             <a:picLocks noChangeAspect="1"/>
           </p:cNvPicPr>
           <p:nvPr/>
         </p:nvPicPr>
         <p:blipFill>
-          <a:blip r:embed="rId2"/>
+          <a:blip r:embed="rId3"/>
           <a:stretch>
             <a:fillRect/>
           </a:stretch>
@@ -5063,7 +5063,7 @@
                 </a:solidFill>
                 <a:latin typeface="Apple SD Gothic Neo"/>
               </a:rPr>
-              <a:t>캡처 URL : https://www.nullstock.im/?legal=terms</a:t>
+              <a:t>캡처 URL : https://www.nullstock.im (메인 화면 최하단)</a:t>
             </a:r>
           </a:p>
         </p:txBody>
@@ -5133,7 +5133,7 @@
                 </a:solidFill>
                 <a:latin typeface="Apple SD Gothic Neo"/>
               </a:rPr>
-              <a:t>③ 환불규정 캡처 (2/2)</a:t>
+              <a:t>③ 환불규정 캡처 (1/2)</a:t>
             </a:r>
           </a:p>
         </p:txBody>
@@ -5172,14 +5172,14 @@
                 </a:solidFill>
                 <a:latin typeface="Apple SD Gothic Neo"/>
               </a:rPr>
-              <a:t>이용약관 제12조(환불 정책) 이어짐 — 환불 절차·처리 기한(영업일 3~7일)·관계 법령 우선 적용</a:t>
+              <a:t>이용약관 제12조(환불 정책) — 결제 전 고지·미사용 시 전액 환불·유료 기능 사용 후 환불 제한</a:t>
             </a:r>
           </a:p>
         </p:txBody>
       </p:sp>
       <p:pic>
         <p:nvPicPr>
-          <p:cNvPr id="4" name="Picture 3" descr="03b_refund_cont.png"/>
+          <p:cNvPr id="4" name="Picture 3" descr="03_refund.png"/>
           <p:cNvPicPr>
             <a:picLocks noChangeAspect="1"/>
           </p:cNvPicPr>
@@ -5310,7 +5310,7 @@
                 </a:solidFill>
                 <a:latin typeface="Apple SD Gothic Neo"/>
               </a:rPr>
-              <a:t>④ 로그인 / 회원가입 캡처 (가입)</a:t>
+              <a:t>③ 환불규정 캡처 (2/2)</a:t>
             </a:r>
           </a:p>
         </p:txBody>
@@ -5349,14 +5349,14 @@
                 </a:solidFill>
                 <a:latin typeface="Apple SD Gothic Neo"/>
               </a:rPr>
-              <a:t>이메일 회원가입 경로 — 이름 / 이메일 / 비밀번호 / 약관 동의 후 가입</a:t>
+              <a:t>이용약관 제12조(환불 정책) 이어짐 — 환불 절차·처리 기한(영업일 3~7일)·관계 법령 우선 적용</a:t>
             </a:r>
           </a:p>
         </p:txBody>
       </p:sp>
       <p:pic>
         <p:nvPicPr>
-          <p:cNvPr id="4" name="Picture 3" descr="04_register.png"/>
+          <p:cNvPr id="4" name="Picture 3" descr="03b_refund_cont.png"/>
           <p:cNvPicPr>
             <a:picLocks noChangeAspect="1"/>
           </p:cNvPicPr>
@@ -5417,7 +5417,7 @@
                 </a:solidFill>
                 <a:latin typeface="Apple SD Gothic Neo"/>
               </a:rPr>
-              <a:t>캡처 URL : https://www.nullstock.im/register</a:t>
+              <a:t>캡처 URL : https://www.nullstock.im/?legal=terms</a:t>
             </a:r>
           </a:p>
         </p:txBody>
@@ -5487,7 +5487,7 @@
                 </a:solidFill>
                 <a:latin typeface="Apple SD Gothic Neo"/>
               </a:rPr>
-              <a:t>④ 로그인 / 회원가입 캡처 (로그인)</a:t>
+              <a:t>④ 로그인 / 회원가입 캡처 (가입)</a:t>
             </a:r>
           </a:p>
         </p:txBody>
@@ -5526,14 +5526,14 @@
                 </a:solidFill>
                 <a:latin typeface="Apple SD Gothic Neo"/>
               </a:rPr>
-              <a:t>이메일 로그인 경로 — 테스트계정(toss_tester@toss.com)으로 로그인하여 이후 결제 과정을 진행</a:t>
+              <a:t>이메일 회원가입 경로 — 이름 / 이메일 / 비밀번호 / 약관 동의 후 가입</a:t>
             </a:r>
           </a:p>
         </p:txBody>
       </p:sp>
       <p:pic>
         <p:nvPicPr>
-          <p:cNvPr id="4" name="Picture 3" descr="05_login_filled.png"/>
+          <p:cNvPr id="4" name="Picture 3" descr="04_register.png"/>
           <p:cNvPicPr>
             <a:picLocks noChangeAspect="1"/>
           </p:cNvPicPr>
@@ -5594,7 +5594,7 @@
                 </a:solidFill>
                 <a:latin typeface="Apple SD Gothic Neo"/>
               </a:rPr>
-              <a:t>캡처 URL : https://www.nullstock.im/login</a:t>
+              <a:t>캡처 URL : https://www.nullstock.im/register</a:t>
             </a:r>
           </a:p>
         </p:txBody>
@@ -5664,7 +5664,7 @@
                 </a:solidFill>
                 <a:latin typeface="Apple SD Gothic Neo"/>
               </a:rPr>
-              <a:t>⑤ 상품 선택 / 구매과정 캡처 (상품 선택)</a:t>
+              <a:t>④ 로그인 / 회원가입 캡처 (로그인)</a:t>
             </a:r>
           </a:p>
         </p:txBody>
@@ -5703,14 +5703,14 @@
                 </a:solidFill>
                 <a:latin typeface="Apple SD Gothic Neo"/>
               </a:rPr>
-              <a:t>요금제 화면 — Free / Pro(월 25,000원) / Premium(월 49,000원), 플랜별 제공 기능과 금액(VAT 포함) 표시</a:t>
+              <a:t>이메일 로그인 경로 — 테스트계정(toss_tester@toss.com)으로 로그인하여 이후 결제 과정을 진행</a:t>
             </a:r>
           </a:p>
         </p:txBody>
       </p:sp>
       <p:pic>
         <p:nvPicPr>
-          <p:cNvPr id="4" name="Picture 3" descr="06_pricing.png"/>
+          <p:cNvPr id="4" name="Picture 3" descr="05_login_filled.png"/>
           <p:cNvPicPr>
             <a:picLocks noChangeAspect="1"/>
           </p:cNvPicPr>
@@ -5771,7 +5771,7 @@
                 </a:solidFill>
                 <a:latin typeface="Apple SD Gothic Neo"/>
               </a:rPr>
-              <a:t>캡처 URL : https://www.nullstock.im/pricing</a:t>
+              <a:t>캡처 URL : https://www.nullstock.im/login</a:t>
             </a:r>
           </a:p>
         </p:txBody>
@@ -5841,7 +5841,7 @@
                 </a:solidFill>
                 <a:latin typeface="Apple SD Gothic Neo"/>
               </a:rPr>
-              <a:t>⑤ 상품 선택 / 구매과정 캡처 (주문 확인)</a:t>
+              <a:t>⑤ 상품 선택 / 구매과정 캡처 (상품 선택)</a:t>
             </a:r>
           </a:p>
         </p:txBody>
@@ -5880,14 +5880,14 @@
                 </a:solidFill>
                 <a:latin typeface="Apple SD Gothic Neo"/>
               </a:rPr>
-              <a:t>'구독 시작하기' 클릭 시 주문 확인 모달 — 상품명 / 결제 금액 / 결제 방식(자동결제·매월 갱신) / 환불 조건 고지 후 '결제하기'</a:t>
+              <a:t>요금제 화면 — Free / Pro(월 25,000원) / Premium(월 49,000원), 플랜별 제공 기능과 금액(VAT 포함) 표시</a:t>
             </a:r>
           </a:p>
         </p:txBody>
       </p:sp>
       <p:pic>
         <p:nvPicPr>
-          <p:cNvPr id="4" name="Picture 3" descr="07_checkout_modal.png"/>
+          <p:cNvPr id="4" name="Picture 3" descr="06_pricing.png"/>
           <p:cNvPicPr>
             <a:picLocks noChangeAspect="1"/>
           </p:cNvPicPr>
